--- a/formation-102638-juin-2026.pptx
+++ b/formation-102638-juin-2026.pptx
@@ -321,7 +321,7 @@
           <a:p>
             <a:fld id="{DADB2658-7BE8-4FC5-8F36-ABC54AD38E15}" type="datetimeFigureOut">
               <a:rPr lang="fr-FR" smtClean="0"/>
-              <a:t>19/04/2026</a:t>
+              <a:t>21/04/2026</a:t>
             </a:fld>
             <a:endParaRPr lang="fr-FR"/>
           </a:p>
@@ -491,7 +491,7 @@
             <a:fld id="{D680E798-53FF-4C51-A981-953463752515}" type="datetimeFigureOut">
               <a:rPr lang="fr-FR" smtClean="0"/>
               <a:pPr/>
-              <a:t>19/04/2026</a:t>
+              <a:t>21/04/2026</a:t>
             </a:fld>
             <a:endParaRPr lang="fr-FR" dirty="0"/>
           </a:p>
@@ -2405,43 +2405,83 @@
           <a:lstStyle/>
           <a:p>
             <a:r>
-              <a:rPr lang="fr-FR"/>
-              <a:t>Distribuer la grille d’audit : 03-easy-checks/grille-audit-easy-checks.xlsx.</a:t>
-            </a:r>
-          </a:p>
-          <a:p>
-            <a:r>
-              <a:rPr lang="fr-FR"/>
+              <a:rPr lang="fr-FR" dirty="0"/>
+              <a:t>Distribuer la grille d’audit : 03-easy-checks/grille-audit-easy-</a:t>
+            </a:r>
+            <a:r>
+              <a:rPr lang="fr-FR" dirty="0" err="1"/>
+              <a:t>checks.xlsx</a:t>
+            </a:r>
+            <a:r>
+              <a:rPr lang="fr-FR" dirty="0"/>
+              <a:t>.</a:t>
+            </a:r>
+          </a:p>
+          <a:p>
+            <a:r>
+              <a:rPr lang="fr-FR" dirty="0"/>
               <a:t>Onglet Grille vierge à dupliquer par stagiaire, onglet Exemple pour s’orienter, onglet Synthèse pour consolider.</a:t>
             </a:r>
           </a:p>
           <a:p>
             <a:r>
-              <a:rPr lang="fr-FR"/>
+              <a:rPr lang="fr-FR" dirty="0"/>
               <a:t>Timing : 20 min audit individuel, 5 min binôme, 5 min restitution collective.</a:t>
             </a:r>
           </a:p>
           <a:p>
             <a:r>
-              <a:rPr lang="fr-FR"/>
-              <a:t>Outils autorisés : DevTools, HeadingsMap, Colour Contrast Analyser, clavier + casque audio.</a:t>
-            </a:r>
-          </a:p>
-          <a:p>
-            <a:r>
-              <a:rPr lang="fr-FR"/>
+              <a:rPr lang="fr-FR" dirty="0"/>
+              <a:t>Outils autorisés : </a:t>
+            </a:r>
+            <a:r>
+              <a:rPr lang="fr-FR" dirty="0" err="1"/>
+              <a:t>DevTools</a:t>
+            </a:r>
+            <a:r>
+              <a:rPr lang="fr-FR" dirty="0"/>
+              <a:t>, </a:t>
+            </a:r>
+            <a:r>
+              <a:rPr lang="fr-FR" dirty="0" err="1"/>
+              <a:t>HeadingsMap</a:t>
+            </a:r>
+            <a:r>
+              <a:rPr lang="fr-FR" dirty="0"/>
+              <a:t>, </a:t>
+            </a:r>
+            <a:r>
+              <a:rPr lang="fr-FR" dirty="0" err="1"/>
+              <a:t>Colour</a:t>
+            </a:r>
+            <a:r>
+              <a:rPr lang="fr-FR" dirty="0"/>
+              <a:t> </a:t>
+            </a:r>
+            <a:r>
+              <a:rPr lang="fr-FR" dirty="0" err="1"/>
+              <a:t>Contrast</a:t>
+            </a:r>
+            <a:r>
+              <a:rPr lang="fr-FR" dirty="0"/>
+              <a:t> Analyser, clavier + casque audio.</a:t>
+            </a:r>
+          </a:p>
+          <a:p>
+            <a:r>
+              <a:rPr lang="fr-FR" dirty="0"/>
               <a:t>Clôture métacognitive (R25) : « Quel check vous a surpris ?</a:t>
             </a:r>
           </a:p>
           <a:p>
             <a:r>
-              <a:rPr lang="fr-FR"/>
+              <a:rPr lang="fr-FR" dirty="0"/>
               <a:t>Quel est le plus facile à faire adopter dans votre équipe ? » Engagement (R24) : chaque stagiaire annonce UNE action qu’il lancera dès demain 9 h.</a:t>
             </a:r>
           </a:p>
           <a:p>
             <a:r>
-              <a:rPr lang="fr-FR"/>
+              <a:rPr lang="fr-FR" dirty="0"/>
               <a:t>Livrable individuel : grille Easy Checks remplie + 3 actions priorisées + 1 engagement personnel.</a:t>
             </a:r>
           </a:p>
@@ -2512,25 +2552,33 @@
           <a:lstStyle/>
           <a:p>
             <a:r>
-              <a:rPr lang="fr-FR"/>
-              <a:t>Ouvrir par un chiffre : 97 % des pages web présentent au moins une violation WCAG détectable (source WebAIM Million 2024).</a:t>
-            </a:r>
-          </a:p>
-          <a:p>
-            <a:r>
-              <a:rPr lang="fr-FR"/>
+              <a:rPr lang="fr-FR" dirty="0"/>
+              <a:t>Ouvrir par un chiffre : 97 % des pages web présentent au moins une violation WCAG détectable (source </a:t>
+            </a:r>
+            <a:r>
+              <a:rPr lang="fr-FR" dirty="0" err="1"/>
+              <a:t>WebAIM</a:t>
+            </a:r>
+            <a:r>
+              <a:rPr lang="fr-FR" dirty="0"/>
+              <a:t> Million 2024).</a:t>
+            </a:r>
+          </a:p>
+          <a:p>
+            <a:r>
+              <a:rPr lang="fr-FR" dirty="0"/>
               <a:t>Les Easy Checks sont la trousse de secours du W3C : 13 vérifications qu’un non-technicien peut faire en 20 minutes pour savoir si une page mérite un audit approfondi.</a:t>
             </a:r>
           </a:p>
           <a:p>
             <a:r>
-              <a:rPr lang="fr-FR"/>
+              <a:rPr lang="fr-FR" dirty="0"/>
               <a:t>Annoncer le plan : 13 checks, chacun traité sur 1 à 4 slides selon sa complexité.</a:t>
             </a:r>
           </a:p>
           <a:p>
             <a:r>
-              <a:rPr lang="fr-FR"/>
+              <a:rPr lang="fr-FR" dirty="0"/>
               <a:t>À la fin du module : mission d’audit groupé sur une page de votre choix.</a:t>
             </a:r>
           </a:p>
@@ -5925,7 +5973,7 @@
               <a:buNone/>
             </a:pPr>
             <a:r>
-              <a:rPr lang="fr-FR" sz="1100" b="0" i="0">
+              <a:rPr lang="fr-FR" sz="1100" b="0" i="0" dirty="0">
                 <a:solidFill>
                   <a:srgbClr val="666666"/>
                 </a:solidFill>
@@ -6555,7 +6603,7 @@
               </a:lnSpc>
             </a:pPr>
             <a:r>
-              <a:rPr lang="fr-FR" sz="1000" b="0" i="0">
+              <a:rPr lang="fr-FR" sz="1000" b="0" i="0" dirty="0">
                 <a:solidFill>
                   <a:srgbClr val="666666"/>
                 </a:solidFill>
@@ -6740,7 +6788,7 @@
               <a:buNone/>
             </a:pPr>
             <a:r>
-              <a:rPr lang="fr-FR" sz="1100" b="0" i="0">
+              <a:rPr lang="fr-FR" sz="1100" b="0" i="0" dirty="0">
                 <a:solidFill>
                   <a:srgbClr val="666666"/>
                 </a:solidFill>
@@ -7379,7 +7427,7 @@
               </a:lnSpc>
             </a:pPr>
             <a:r>
-              <a:rPr lang="fr-FR" sz="1000" b="0" i="0">
+              <a:rPr lang="fr-FR" sz="1000" b="0" i="0" dirty="0">
                 <a:solidFill>
                   <a:srgbClr val="666666"/>
                 </a:solidFill>
@@ -7519,7 +7567,7 @@
               <a:buNone/>
             </a:pPr>
             <a:r>
-              <a:rPr lang="fr-FR" sz="1100" b="0" i="0">
+              <a:rPr lang="fr-FR" sz="1100" b="0" i="0" dirty="0">
                 <a:solidFill>
                   <a:srgbClr val="666666"/>
                 </a:solidFill>
@@ -8000,7 +8048,7 @@
               </a:lnSpc>
             </a:pPr>
             <a:r>
-              <a:rPr lang="fr-FR" sz="1000" b="0" i="0">
+              <a:rPr lang="fr-FR" sz="1000" b="0" i="0" dirty="0">
                 <a:solidFill>
                   <a:srgbClr val="666666"/>
                 </a:solidFill>
@@ -8547,7 +8595,7 @@
               </a:lnSpc>
             </a:pPr>
             <a:r>
-              <a:rPr lang="fr-FR" sz="1000" b="0" i="0">
+              <a:rPr lang="fr-FR" sz="1000" b="0" i="0" dirty="0">
                 <a:solidFill>
                   <a:srgbClr val="666666"/>
                 </a:solidFill>
@@ -8732,7 +8780,7 @@
               <a:buNone/>
             </a:pPr>
             <a:r>
-              <a:rPr lang="fr-FR" sz="1100" b="0" i="0">
+              <a:rPr lang="fr-FR" sz="1100" b="0" i="0" dirty="0">
                 <a:solidFill>
                   <a:srgbClr val="666666"/>
                 </a:solidFill>
@@ -9492,7 +9540,7 @@
               </a:lnSpc>
             </a:pPr>
             <a:r>
-              <a:rPr lang="fr-FR" sz="1000" b="0" i="0">
+              <a:rPr lang="fr-FR" sz="1000" b="0" i="0" dirty="0">
                 <a:solidFill>
                   <a:srgbClr val="666666"/>
                 </a:solidFill>
@@ -9632,7 +9680,7 @@
               <a:buNone/>
             </a:pPr>
             <a:r>
-              <a:rPr lang="fr-FR" sz="1100" b="0" i="0">
+              <a:rPr lang="fr-FR" sz="1100" b="0" i="0" dirty="0">
                 <a:solidFill>
                   <a:srgbClr val="666666"/>
                 </a:solidFill>
@@ -10104,7 +10152,7 @@
               </a:lnSpc>
             </a:pPr>
             <a:r>
-              <a:rPr lang="fr-FR" sz="1000" b="0" i="0">
+              <a:rPr lang="fr-FR" sz="1000" b="0" i="0" dirty="0">
                 <a:solidFill>
                   <a:srgbClr val="666666"/>
                 </a:solidFill>
@@ -10505,7 +10553,7 @@
               <a:buNone/>
             </a:pPr>
             <a:r>
-              <a:rPr lang="fr-FR" sz="1100" b="0" i="0">
+              <a:rPr lang="fr-FR" sz="1100" b="0" i="0" dirty="0">
                 <a:solidFill>
                   <a:srgbClr val="666666"/>
                 </a:solidFill>
@@ -10918,7 +10966,7 @@
               </a:lnSpc>
             </a:pPr>
             <a:r>
-              <a:rPr lang="fr-FR" sz="1000" b="0" i="0">
+              <a:rPr lang="fr-FR" sz="1000" b="0" i="0" dirty="0">
                 <a:solidFill>
                   <a:srgbClr val="666666"/>
                 </a:solidFill>
@@ -11103,7 +11151,7 @@
               <a:buNone/>
             </a:pPr>
             <a:r>
-              <a:rPr lang="fr-FR" sz="1100" b="0" i="0">
+              <a:rPr lang="fr-FR" sz="1100" b="0" i="0" dirty="0">
                 <a:solidFill>
                   <a:srgbClr val="666666"/>
                 </a:solidFill>
@@ -11584,7 +11632,7 @@
               </a:lnSpc>
             </a:pPr>
             <a:r>
-              <a:rPr lang="fr-FR" sz="1000" b="0" i="0">
+              <a:rPr lang="fr-FR" sz="1000" b="0" i="0" dirty="0">
                 <a:solidFill>
                   <a:srgbClr val="666666"/>
                 </a:solidFill>
@@ -11814,7 +11862,7 @@
               <a:buNone/>
             </a:pPr>
             <a:r>
-              <a:rPr lang="fr-FR" sz="1100" b="0" i="0">
+              <a:rPr lang="fr-FR" sz="1100" b="0" i="0" dirty="0">
                 <a:solidFill>
                   <a:srgbClr val="666666"/>
                 </a:solidFill>
@@ -12295,7 +12343,7 @@
               </a:lnSpc>
             </a:pPr>
             <a:r>
-              <a:rPr lang="fr-FR" sz="1000" b="0" i="0">
+              <a:rPr lang="fr-FR" sz="1000" b="0" i="0" dirty="0">
                 <a:solidFill>
                   <a:srgbClr val="666666"/>
                 </a:solidFill>
@@ -12525,7 +12573,7 @@
               <a:buNone/>
             </a:pPr>
             <a:r>
-              <a:rPr lang="fr-FR" sz="1100" b="0" i="0">
+              <a:rPr lang="fr-FR" sz="1100" b="0" i="0" dirty="0">
                 <a:solidFill>
                   <a:srgbClr val="666666"/>
                 </a:solidFill>
@@ -12867,7 +12915,7 @@
               </a:lnSpc>
             </a:pPr>
             <a:r>
-              <a:rPr lang="fr-FR" sz="1000" b="0" i="0">
+              <a:rPr lang="fr-FR" sz="1000" b="0" i="0" dirty="0">
                 <a:solidFill>
                   <a:srgbClr val="666666"/>
                 </a:solidFill>
@@ -13441,7 +13489,7 @@
               <a:buNone/>
             </a:pPr>
             <a:r>
-              <a:rPr lang="fr-FR" sz="1100" b="0" i="0">
+              <a:rPr lang="fr-FR" sz="1100" b="0" i="0" dirty="0">
                 <a:solidFill>
                   <a:srgbClr val="666666"/>
                 </a:solidFill>
@@ -13870,7 +13918,7 @@
               </a:lnSpc>
             </a:pPr>
             <a:r>
-              <a:rPr lang="fr-FR" sz="1000" b="0" i="0">
+              <a:rPr lang="fr-FR" sz="1000" b="0" i="0" dirty="0">
                 <a:solidFill>
                   <a:srgbClr val="666666"/>
                 </a:solidFill>
@@ -14055,7 +14103,7 @@
               <a:buNone/>
             </a:pPr>
             <a:r>
-              <a:rPr lang="fr-FR" sz="1100" b="0" i="0">
+              <a:rPr lang="fr-FR" sz="1100" b="0" i="0" dirty="0">
                 <a:solidFill>
                   <a:srgbClr val="666666"/>
                 </a:solidFill>
@@ -14552,7 +14600,7 @@
               </a:lnSpc>
             </a:pPr>
             <a:r>
-              <a:rPr lang="fr-FR" sz="1000" b="0" i="0">
+              <a:rPr lang="fr-FR" sz="1000" b="0" i="0" dirty="0">
                 <a:solidFill>
                   <a:srgbClr val="666666"/>
                 </a:solidFill>
@@ -14782,7 +14830,7 @@
               <a:buNone/>
             </a:pPr>
             <a:r>
-              <a:rPr lang="fr-FR" sz="1100" b="0" i="0">
+              <a:rPr lang="fr-FR" sz="1100" b="0" i="0" dirty="0">
                 <a:solidFill>
                   <a:srgbClr val="666666"/>
                 </a:solidFill>
@@ -15263,7 +15311,7 @@
               </a:lnSpc>
             </a:pPr>
             <a:r>
-              <a:rPr lang="fr-FR" sz="1000" b="0" i="0">
+              <a:rPr lang="fr-FR" sz="1000" b="0" i="0" dirty="0">
                 <a:solidFill>
                   <a:srgbClr val="666666"/>
                 </a:solidFill>
@@ -15493,7 +15541,7 @@
               <a:buNone/>
             </a:pPr>
             <a:r>
-              <a:rPr lang="fr-FR" sz="1100" b="0" i="0">
+              <a:rPr lang="fr-FR" sz="1100" b="0" i="0" dirty="0">
                 <a:solidFill>
                   <a:srgbClr val="666666"/>
                 </a:solidFill>
@@ -15851,7 +15899,7 @@
               </a:lnSpc>
             </a:pPr>
             <a:r>
-              <a:rPr lang="fr-FR" sz="1000" b="0" i="0">
+              <a:rPr lang="fr-FR" sz="1000" b="0" i="0" dirty="0">
                 <a:solidFill>
                   <a:srgbClr val="666666"/>
                 </a:solidFill>
@@ -16036,7 +16084,7 @@
               <a:buNone/>
             </a:pPr>
             <a:r>
-              <a:rPr lang="fr-FR" sz="1100" b="0" i="0">
+              <a:rPr lang="fr-FR" sz="1100" b="0" i="0" dirty="0">
                 <a:solidFill>
                   <a:srgbClr val="666666"/>
                 </a:solidFill>
@@ -16465,7 +16513,7 @@
               </a:lnSpc>
             </a:pPr>
             <a:r>
-              <a:rPr lang="fr-FR" sz="1000" b="0" i="0">
+              <a:rPr lang="fr-FR" sz="1000" b="0" i="0" dirty="0">
                 <a:solidFill>
                   <a:srgbClr val="666666"/>
                 </a:solidFill>
@@ -16650,7 +16698,7 @@
               <a:buNone/>
             </a:pPr>
             <a:r>
-              <a:rPr lang="fr-FR" sz="1100" b="0" i="0">
+              <a:rPr lang="fr-FR" sz="1100" b="0" i="0" dirty="0">
                 <a:solidFill>
                   <a:srgbClr val="666666"/>
                 </a:solidFill>
@@ -17217,7 +17265,7 @@
               </a:lnSpc>
             </a:pPr>
             <a:r>
-              <a:rPr lang="fr-FR" sz="1000" b="0" i="0">
+              <a:rPr lang="fr-FR" sz="1000" b="0" i="0" dirty="0">
                 <a:solidFill>
                   <a:srgbClr val="666666"/>
                 </a:solidFill>
@@ -17357,7 +17405,7 @@
               <a:buNone/>
             </a:pPr>
             <a:r>
-              <a:rPr lang="fr-FR" sz="1100" b="0" i="0">
+              <a:rPr lang="fr-FR" sz="1100" b="0" i="0" dirty="0">
                 <a:solidFill>
                   <a:srgbClr val="666666"/>
                 </a:solidFill>
@@ -17838,7 +17886,7 @@
               </a:lnSpc>
             </a:pPr>
             <a:r>
-              <a:rPr lang="fr-FR" sz="1000" b="0" i="0">
+              <a:rPr lang="fr-FR" sz="1000" b="0" i="0" dirty="0">
                 <a:solidFill>
                   <a:srgbClr val="666666"/>
                 </a:solidFill>
@@ -18068,7 +18116,7 @@
               <a:buNone/>
             </a:pPr>
             <a:r>
-              <a:rPr lang="fr-FR" sz="1100" b="0" i="0">
+              <a:rPr lang="fr-FR" sz="1100" b="0" i="0" dirty="0">
                 <a:solidFill>
                   <a:srgbClr val="666666"/>
                 </a:solidFill>
@@ -18185,7 +18233,7 @@
               </a:lnSpc>
             </a:pPr>
             <a:r>
-              <a:rPr lang="fr-FR" sz="1400" b="1" i="0">
+              <a:rPr lang="fr-FR" sz="1400" b="1" i="0" dirty="0">
                 <a:solidFill>
                   <a:srgbClr val="000091"/>
                 </a:solidFill>
@@ -18726,7 +18774,7 @@
               </a:lnSpc>
             </a:pPr>
             <a:r>
-              <a:rPr lang="fr-FR" sz="1000" b="0" i="0">
+              <a:rPr lang="fr-FR" sz="1000" b="0" i="0" dirty="0">
                 <a:solidFill>
                   <a:srgbClr val="666666"/>
                 </a:solidFill>
@@ -19054,25 +19102,7 @@
                 </a:solidFill>
                 <a:latin typeface="Marianne"/>
               </a:rPr>
-              <a:t>3. Les 13 </a:t>
-            </a:r>
-            <a:r>
-              <a:rPr lang="fr-FR" sz="3200" b="1" i="0" dirty="0" err="1">
-                <a:solidFill>
-                  <a:srgbClr val="000091"/>
-                </a:solidFill>
-                <a:latin typeface="Marianne"/>
-              </a:rPr>
-              <a:t>easy</a:t>
-            </a:r>
-            <a:r>
-              <a:rPr lang="fr-FR" sz="3200" b="1" i="0" dirty="0">
-                <a:solidFill>
-                  <a:srgbClr val="000091"/>
-                </a:solidFill>
-                <a:latin typeface="Marianne"/>
-              </a:rPr>
-              <a:t> checks du W3C</a:t>
+              <a:t>3. Les 13 easy checks du W3C</a:t>
             </a:r>
           </a:p>
         </p:txBody>
@@ -19131,7 +19161,7 @@
               </a:lnSpc>
             </a:pPr>
             <a:r>
-              <a:rPr lang="fr-FR" sz="1000" b="0" i="0">
+              <a:rPr lang="fr-FR" sz="1000" b="0" i="0" dirty="0">
                 <a:solidFill>
                   <a:srgbClr val="666666"/>
                 </a:solidFill>
@@ -19271,7 +19301,7 @@
               <a:buNone/>
             </a:pPr>
             <a:r>
-              <a:rPr lang="fr-FR" sz="1100" b="0" i="0">
+              <a:rPr lang="fr-FR" sz="1100" b="0" i="0" dirty="0">
                 <a:solidFill>
                   <a:srgbClr val="666666"/>
                 </a:solidFill>
@@ -19954,14 +19984,29 @@
               </a:lnSpc>
             </a:pPr>
             <a:r>
-              <a:rPr lang="fr-FR" sz="1000" b="0" i="0">
+              <a:rPr lang="fr-FR" sz="1000" b="0" i="0" dirty="0">
                 <a:solidFill>
                   <a:srgbClr val="666666"/>
                 </a:solidFill>
                 <a:latin typeface="Marianne"/>
               </a:rPr>
-              <a:t>Formation 102638 / Easy Checks - Alt text</a:t>
-            </a:r>
+              <a:t>Formation 102638 / Easy Checks - Alt </a:t>
+            </a:r>
+            <a:r>
+              <a:rPr lang="fr-FR" sz="1000" b="0" i="0" dirty="0" err="1">
+                <a:solidFill>
+                  <a:srgbClr val="666666"/>
+                </a:solidFill>
+                <a:latin typeface="Marianne"/>
+              </a:rPr>
+              <a:t>text</a:t>
+            </a:r>
+            <a:endParaRPr lang="fr-FR" sz="1000" b="0" i="0" dirty="0">
+              <a:solidFill>
+                <a:srgbClr val="666666"/>
+              </a:solidFill>
+              <a:latin typeface="Marianne"/>
+            </a:endParaRPr>
           </a:p>
         </p:txBody>
       </p:sp>
@@ -20502,7 +20547,7 @@
               <a:buNone/>
             </a:pPr>
             <a:r>
-              <a:rPr lang="fr-FR" sz="1100" b="0" i="0">
+              <a:rPr lang="fr-FR" sz="1100" b="0" i="0" dirty="0">
                 <a:solidFill>
                   <a:srgbClr val="666666"/>
                 </a:solidFill>
@@ -20931,14 +20976,29 @@
               </a:lnSpc>
             </a:pPr>
             <a:r>
-              <a:rPr lang="fr-FR" sz="1000" b="0" i="0">
+              <a:rPr lang="fr-FR" sz="1000" b="0" i="0" dirty="0">
                 <a:solidFill>
                   <a:srgbClr val="666666"/>
                 </a:solidFill>
                 <a:latin typeface="Marianne"/>
               </a:rPr>
-              <a:t>Formation 102638 / Easy Checks - Alt text</a:t>
-            </a:r>
+              <a:t>Formation 102638 / Easy Checks - Alt </a:t>
+            </a:r>
+            <a:r>
+              <a:rPr lang="fr-FR" sz="1000" b="0" i="0" dirty="0" err="1">
+                <a:solidFill>
+                  <a:srgbClr val="666666"/>
+                </a:solidFill>
+                <a:latin typeface="Marianne"/>
+              </a:rPr>
+              <a:t>text</a:t>
+            </a:r>
+            <a:endParaRPr lang="fr-FR" sz="1000" b="0" i="0" dirty="0">
+              <a:solidFill>
+                <a:srgbClr val="666666"/>
+              </a:solidFill>
+              <a:latin typeface="Marianne"/>
+            </a:endParaRPr>
           </a:p>
         </p:txBody>
       </p:sp>
@@ -21116,7 +21176,7 @@
               <a:buNone/>
             </a:pPr>
             <a:r>
-              <a:rPr lang="fr-FR" sz="1100" b="0" i="0">
+              <a:rPr lang="fr-FR" sz="1100" b="0" i="0" dirty="0">
                 <a:solidFill>
                   <a:srgbClr val="666666"/>
                 </a:solidFill>
@@ -21792,14 +21852,29 @@
               </a:lnSpc>
             </a:pPr>
             <a:r>
-              <a:rPr lang="fr-FR" sz="1000" b="0" i="0">
+              <a:rPr lang="fr-FR" sz="1000" b="0" i="0" dirty="0">
                 <a:solidFill>
                   <a:srgbClr val="666666"/>
                 </a:solidFill>
                 <a:latin typeface="Marianne"/>
               </a:rPr>
-              <a:t>Formation 102638 / Easy Checks - Alt text</a:t>
-            </a:r>
+              <a:t>Formation 102638 / Easy Checks - Alt </a:t>
+            </a:r>
+            <a:r>
+              <a:rPr lang="fr-FR" sz="1000" b="0" i="0" dirty="0" err="1">
+                <a:solidFill>
+                  <a:srgbClr val="666666"/>
+                </a:solidFill>
+                <a:latin typeface="Marianne"/>
+              </a:rPr>
+              <a:t>text</a:t>
+            </a:r>
+            <a:endParaRPr lang="fr-FR" sz="1000" b="0" i="0" dirty="0">
+              <a:solidFill>
+                <a:srgbClr val="666666"/>
+              </a:solidFill>
+              <a:latin typeface="Marianne"/>
+            </a:endParaRPr>
           </a:p>
         </p:txBody>
       </p:sp>
@@ -21887,7 +21962,7 @@
               <a:buNone/>
             </a:pPr>
             <a:r>
-              <a:rPr lang="fr-FR" sz="1100" b="0" i="0">
+              <a:rPr lang="fr-FR" sz="1100" b="0" i="0" dirty="0">
                 <a:solidFill>
                   <a:srgbClr val="666666"/>
                 </a:solidFill>
@@ -22402,7 +22477,7 @@
               </a:lnSpc>
             </a:pPr>
             <a:r>
-              <a:rPr lang="fr-FR" sz="1000" b="0" i="0">
+              <a:rPr lang="fr-FR" sz="1000" b="0" i="0" dirty="0">
                 <a:solidFill>
                   <a:srgbClr val="666666"/>
                 </a:solidFill>
@@ -22632,7 +22707,7 @@
               <a:buNone/>
             </a:pPr>
             <a:r>
-              <a:rPr lang="fr-FR" sz="1100" b="0" i="0">
+              <a:rPr lang="fr-FR" sz="1100" b="0" i="0" dirty="0">
                 <a:solidFill>
                   <a:srgbClr val="666666"/>
                 </a:solidFill>
@@ -22974,7 +23049,7 @@
               </a:lnSpc>
             </a:pPr>
             <a:r>
-              <a:rPr lang="fr-FR" sz="1000" b="0" i="0">
+              <a:rPr lang="fr-FR" sz="1000" b="0" i="0" dirty="0">
                 <a:solidFill>
                   <a:srgbClr val="666666"/>
                 </a:solidFill>
@@ -23159,7 +23234,7 @@
               <a:buNone/>
             </a:pPr>
             <a:r>
-              <a:rPr lang="fr-FR" sz="1100" b="0" i="0">
+              <a:rPr lang="fr-FR" sz="1100" b="0" i="0" dirty="0">
                 <a:solidFill>
                   <a:srgbClr val="666666"/>
                 </a:solidFill>
@@ -23659,7 +23734,7 @@
               </a:lnSpc>
             </a:pPr>
             <a:r>
-              <a:rPr lang="fr-FR" sz="1000" b="0" i="0">
+              <a:rPr lang="fr-FR" sz="1000" b="0" i="0" dirty="0">
                 <a:solidFill>
                   <a:srgbClr val="666666"/>
                 </a:solidFill>
